--- a/backend/templates/template3.pptx
+++ b/backend/templates/template3.pptx
@@ -271,6 +271,70 @@
           </a:p>
         </p:txBody>
       </p:sp>
+      <p:sp>
+        <p:nvSpPr>
+          <p:cNvPr id="9" name="Footer Placeholder 3">
+            <a:extLst>
+              <a:ext uri="{FF2B5EF4-FFF2-40B4-BE49-F238E27FC236}">
+                <a16:creationId xmlns:a16="http://schemas.microsoft.com/office/drawing/2014/main" id="{466BD285-8EA3-82F1-D3D7-C37B42174BE4}"/>
+              </a:ext>
+            </a:extLst>
+          </p:cNvPr>
+          <p:cNvSpPr>
+            <a:spLocks noGrp="1"/>
+          </p:cNvSpPr>
+          <p:nvPr>
+            <p:ph type="ftr" sz="quarter" idx="12"/>
+          </p:nvPr>
+        </p:nvSpPr>
+        <p:spPr>
+          <a:xfrm>
+            <a:off x="203198" y="6577445"/>
+            <a:ext cx="8925216" cy="206878"/>
+          </a:xfrm>
+        </p:spPr>
+        <p:txBody>
+          <a:bodyPr/>
+          <a:lstStyle/>
+          <a:p>
+            <a:endParaRPr lang="en-US" dirty="0"/>
+          </a:p>
+        </p:txBody>
+      </p:sp>
+      <p:sp>
+        <p:nvSpPr>
+          <p:cNvPr id="10" name="Slide Number Placeholder 4">
+            <a:extLst>
+              <a:ext uri="{FF2B5EF4-FFF2-40B4-BE49-F238E27FC236}">
+                <a16:creationId xmlns:a16="http://schemas.microsoft.com/office/drawing/2014/main" id="{5A90A644-EA26-30E0-AB79-EECD08156C0A}"/>
+              </a:ext>
+            </a:extLst>
+          </p:cNvPr>
+          <p:cNvSpPr>
+            <a:spLocks noGrp="1"/>
+          </p:cNvSpPr>
+          <p:nvPr>
+            <p:ph type="sldNum" sz="quarter" idx="13"/>
+          </p:nvPr>
+        </p:nvSpPr>
+        <p:spPr>
+          <a:xfrm>
+            <a:off x="9242713" y="6577445"/>
+            <a:ext cx="2743200" cy="206878"/>
+          </a:xfrm>
+        </p:spPr>
+        <p:txBody>
+          <a:bodyPr/>
+          <a:lstStyle/>
+          <a:p>
+            <a:fld id="{3328C88C-319F-4B98-9ED6-FBE1B0819F4B}" type="slidenum">
+              <a:rPr lang="en-US" smtClean="0"/>
+              <a:t>‹#›</a:t>
+            </a:fld>
+            <a:endParaRPr lang="en-US"/>
+          </a:p>
+        </p:txBody>
+      </p:sp>
     </p:spTree>
     <p:extLst>
       <p:ext uri="{BB962C8B-B14F-4D97-AF65-F5344CB8AC3E}">
@@ -392,8 +456,8 @@
         </p:nvSpPr>
         <p:spPr>
           <a:xfrm>
-            <a:off x="203200" y="755836"/>
-            <a:ext cx="11582400" cy="4351338"/>
+            <a:off x="203199" y="1034753"/>
+            <a:ext cx="11782715" cy="5287906"/>
           </a:xfrm>
         </p:spPr>
         <p:txBody>
@@ -455,46 +519,101 @@
       </p:cxnSp>
       <p:sp>
         <p:nvSpPr>
-          <p:cNvPr id="12" name="Content Placeholder 2">
-            <a:extLst>
-              <a:ext uri="{FF2B5EF4-FFF2-40B4-BE49-F238E27FC236}">
-                <a16:creationId xmlns:a16="http://schemas.microsoft.com/office/drawing/2014/main" id="{428EB7EE-5A29-75A5-210C-A02C3D46A39A}"/>
-              </a:ext>
-            </a:extLst>
-          </p:cNvPr>
-          <p:cNvSpPr>
-            <a:spLocks noGrp="1"/>
-          </p:cNvSpPr>
-          <p:nvPr>
-            <p:ph sz="half" idx="10"/>
-          </p:nvPr>
-        </p:nvSpPr>
-        <p:spPr>
-          <a:xfrm>
-            <a:off x="98612" y="6534617"/>
-            <a:ext cx="11582400" cy="211958"/>
-          </a:xfrm>
-        </p:spPr>
-        <p:txBody>
-          <a:bodyPr>
-            <a:normAutofit/>
-          </a:bodyPr>
+          <p:cNvPr id="2" name="Title 1">
+            <a:extLst>
+              <a:ext uri="{FF2B5EF4-FFF2-40B4-BE49-F238E27FC236}">
+                <a16:creationId xmlns:a16="http://schemas.microsoft.com/office/drawing/2014/main" id="{D4FCBEF7-0DD1-9A36-978E-61A285C3E270}"/>
+              </a:ext>
+            </a:extLst>
+          </p:cNvPr>
+          <p:cNvSpPr>
+            <a:spLocks noGrp="1"/>
+          </p:cNvSpPr>
+          <p:nvPr>
+            <p:ph type="ctrTitle"/>
+          </p:nvPr>
+        </p:nvSpPr>
+        <p:spPr>
+          <a:xfrm>
+            <a:off x="203198" y="631573"/>
+            <a:ext cx="11782715" cy="344693"/>
+          </a:xfrm>
+        </p:spPr>
+        <p:txBody>
+          <a:bodyPr anchor="b"/>
           <a:lstStyle>
-            <a:lvl1pPr>
-              <a:buNone/>
-              <a:defRPr lang="en-US" sz="1100" kern="1200" dirty="0">
-                <a:solidFill>
-                  <a:schemeClr val="tx1"/>
-                </a:solidFill>
-                <a:latin typeface="Trade Gothic Next" panose="020F0502020204030204" pitchFamily="34" charset="0"/>
-                <a:ea typeface="+mn-ea"/>
-                <a:cs typeface="+mn-cs"/>
-              </a:defRPr>
+            <a:lvl1pPr algn="l">
+              <a:defRPr sz="2000"/>
             </a:lvl1pPr>
           </a:lstStyle>
           <a:p>
-            <a:pPr lvl="0"/>
+            <a:endParaRPr lang="en-US" sz="6000" dirty="0">
+              <a:latin typeface="Trade Gothic Next" panose="020F0502020204030204" pitchFamily="34" charset="0"/>
+            </a:endParaRPr>
+          </a:p>
+        </p:txBody>
+      </p:sp>
+      <p:sp>
+        <p:nvSpPr>
+          <p:cNvPr id="4" name="Footer Placeholder 3">
+            <a:extLst>
+              <a:ext uri="{FF2B5EF4-FFF2-40B4-BE49-F238E27FC236}">
+                <a16:creationId xmlns:a16="http://schemas.microsoft.com/office/drawing/2014/main" id="{BC7AC4DA-8950-878F-143C-9F5D88FD88FA}"/>
+              </a:ext>
+            </a:extLst>
+          </p:cNvPr>
+          <p:cNvSpPr>
+            <a:spLocks noGrp="1"/>
+          </p:cNvSpPr>
+          <p:nvPr>
+            <p:ph type="ftr" sz="quarter" idx="12"/>
+          </p:nvPr>
+        </p:nvSpPr>
+        <p:spPr>
+          <a:xfrm>
+            <a:off x="203198" y="6577445"/>
+            <a:ext cx="8925216" cy="206878"/>
+          </a:xfrm>
+        </p:spPr>
+        <p:txBody>
+          <a:bodyPr/>
+          <a:lstStyle/>
+          <a:p>
             <a:endParaRPr lang="en-US" dirty="0"/>
+          </a:p>
+        </p:txBody>
+      </p:sp>
+      <p:sp>
+        <p:nvSpPr>
+          <p:cNvPr id="5" name="Slide Number Placeholder 4">
+            <a:extLst>
+              <a:ext uri="{FF2B5EF4-FFF2-40B4-BE49-F238E27FC236}">
+                <a16:creationId xmlns:a16="http://schemas.microsoft.com/office/drawing/2014/main" id="{07462B28-8503-3134-82A1-BFBBFFF95C3E}"/>
+              </a:ext>
+            </a:extLst>
+          </p:cNvPr>
+          <p:cNvSpPr>
+            <a:spLocks noGrp="1"/>
+          </p:cNvSpPr>
+          <p:nvPr>
+            <p:ph type="sldNum" sz="quarter" idx="13"/>
+          </p:nvPr>
+        </p:nvSpPr>
+        <p:spPr>
+          <a:xfrm>
+            <a:off x="9242713" y="6577445"/>
+            <a:ext cx="2743200" cy="206878"/>
+          </a:xfrm>
+        </p:spPr>
+        <p:txBody>
+          <a:bodyPr/>
+          <a:lstStyle/>
+          <a:p>
+            <a:fld id="{3328C88C-319F-4B98-9ED6-FBE1B0819F4B}" type="slidenum">
+              <a:rPr lang="en-US" smtClean="0"/>
+              <a:t>‹#›</a:t>
+            </a:fld>
+            <a:endParaRPr lang="en-US"/>
           </a:p>
         </p:txBody>
       </p:sp>
@@ -513,7 +632,7 @@
 
 <file path=ppt/slideLayouts/slideLayout3.xml><?xml version="1.0" encoding="utf-8"?>
 <p:sldLayout xmlns:a="http://schemas.openxmlformats.org/drawingml/2006/main" xmlns:r="http://schemas.openxmlformats.org/officeDocument/2006/relationships" xmlns:p="http://schemas.openxmlformats.org/presentationml/2006/main" preserve="1" userDrawn="1">
-  <p:cSld name="1_Title and Content">
+  <p:cSld name="2_Title and Content">
     <p:spTree>
       <p:nvGrpSpPr>
         <p:cNvPr id="1" name=""/>
@@ -601,6 +720,49 @@
           </a:fontRef>
         </p:style>
       </p:cxnSp>
+      <p:sp>
+        <p:nvSpPr>
+          <p:cNvPr id="10" name="Content Placeholder 2">
+            <a:extLst>
+              <a:ext uri="{FF2B5EF4-FFF2-40B4-BE49-F238E27FC236}">
+                <a16:creationId xmlns:a16="http://schemas.microsoft.com/office/drawing/2014/main" id="{73B4BCF8-14EF-8454-6514-665580FA0730}"/>
+              </a:ext>
+            </a:extLst>
+          </p:cNvPr>
+          <p:cNvSpPr>
+            <a:spLocks noGrp="1"/>
+          </p:cNvSpPr>
+          <p:nvPr>
+            <p:ph sz="half" idx="1"/>
+          </p:nvPr>
+        </p:nvSpPr>
+        <p:spPr>
+          <a:xfrm>
+            <a:off x="203200" y="1034750"/>
+            <a:ext cx="5714274" cy="5287909"/>
+          </a:xfrm>
+        </p:spPr>
+        <p:txBody>
+          <a:bodyPr/>
+          <a:lstStyle>
+            <a:lvl1pPr>
+              <a:buNone/>
+              <a:defRPr lang="en-US" sz="2400" kern="1200" dirty="0">
+                <a:solidFill>
+                  <a:schemeClr val="tx1"/>
+                </a:solidFill>
+                <a:latin typeface="Trade Gothic Next" panose="020F0502020204030204" pitchFamily="34" charset="0"/>
+                <a:ea typeface="+mn-ea"/>
+                <a:cs typeface="+mn-cs"/>
+              </a:defRPr>
+            </a:lvl1pPr>
+          </a:lstStyle>
+          <a:p>
+            <a:pPr lvl="0"/>
+            <a:endParaRPr lang="en-US" dirty="0"/>
+          </a:p>
+        </p:txBody>
+      </p:sp>
       <p:cxnSp>
         <p:nvCxnSpPr>
           <p:cNvPr id="11" name="Straight Connector 10">
@@ -639,34 +801,32 @@
       </p:cxnSp>
       <p:sp>
         <p:nvSpPr>
-          <p:cNvPr id="12" name="Content Placeholder 2">
-            <a:extLst>
-              <a:ext uri="{FF2B5EF4-FFF2-40B4-BE49-F238E27FC236}">
-                <a16:creationId xmlns:a16="http://schemas.microsoft.com/office/drawing/2014/main" id="{428EB7EE-5A29-75A5-210C-A02C3D46A39A}"/>
-              </a:ext>
-            </a:extLst>
-          </p:cNvPr>
-          <p:cNvSpPr>
-            <a:spLocks noGrp="1"/>
-          </p:cNvSpPr>
-          <p:nvPr>
-            <p:ph sz="half" idx="10"/>
-          </p:nvPr>
-        </p:nvSpPr>
-        <p:spPr>
-          <a:xfrm>
-            <a:off x="98612" y="6534617"/>
-            <a:ext cx="11582400" cy="211958"/>
-          </a:xfrm>
-        </p:spPr>
-        <p:txBody>
-          <a:bodyPr>
-            <a:normAutofit/>
-          </a:bodyPr>
+          <p:cNvPr id="3" name="Content Placeholder 2">
+            <a:extLst>
+              <a:ext uri="{FF2B5EF4-FFF2-40B4-BE49-F238E27FC236}">
+                <a16:creationId xmlns:a16="http://schemas.microsoft.com/office/drawing/2014/main" id="{21E7836D-3AFF-EAFB-894F-D24C3AAD57BB}"/>
+              </a:ext>
+            </a:extLst>
+          </p:cNvPr>
+          <p:cNvSpPr>
+            <a:spLocks noGrp="1"/>
+          </p:cNvSpPr>
+          <p:nvPr>
+            <p:ph sz="half" idx="11"/>
+          </p:nvPr>
+        </p:nvSpPr>
+        <p:spPr>
+          <a:xfrm>
+            <a:off x="6271640" y="1034748"/>
+            <a:ext cx="5714274" cy="5287909"/>
+          </a:xfrm>
+        </p:spPr>
+        <p:txBody>
+          <a:bodyPr/>
           <a:lstStyle>
             <a:lvl1pPr>
               <a:buNone/>
-              <a:defRPr lang="en-US" sz="1100" kern="1200" dirty="0">
+              <a:defRPr lang="en-US" sz="2400" kern="1200" dirty="0">
                 <a:solidFill>
                   <a:schemeClr val="tx1"/>
                 </a:solidFill>
@@ -684,30 +844,369 @@
       </p:sp>
       <p:sp>
         <p:nvSpPr>
-          <p:cNvPr id="3" name="Table Placeholder 2">
-            <a:extLst>
-              <a:ext uri="{FF2B5EF4-FFF2-40B4-BE49-F238E27FC236}">
-                <a16:creationId xmlns:a16="http://schemas.microsoft.com/office/drawing/2014/main" id="{08FA77EC-EE7D-A602-6D21-6434A18B5E55}"/>
-              </a:ext>
-            </a:extLst>
-          </p:cNvPr>
-          <p:cNvSpPr>
-            <a:spLocks noGrp="1"/>
-          </p:cNvSpPr>
-          <p:nvPr>
-            <p:ph type="tbl" sz="quarter" idx="11"/>
-          </p:nvPr>
-        </p:nvSpPr>
-        <p:spPr>
-          <a:xfrm>
-            <a:off x="203200" y="768350"/>
-            <a:ext cx="11829657" cy="5624358"/>
+          <p:cNvPr id="4" name="Title 1">
+            <a:extLst>
+              <a:ext uri="{FF2B5EF4-FFF2-40B4-BE49-F238E27FC236}">
+                <a16:creationId xmlns:a16="http://schemas.microsoft.com/office/drawing/2014/main" id="{ADA7E6E7-9AF0-0440-9771-E8B67F559093}"/>
+              </a:ext>
+            </a:extLst>
+          </p:cNvPr>
+          <p:cNvSpPr>
+            <a:spLocks noGrp="1"/>
+          </p:cNvSpPr>
+          <p:nvPr>
+            <p:ph type="ctrTitle"/>
+          </p:nvPr>
+        </p:nvSpPr>
+        <p:spPr>
+          <a:xfrm>
+            <a:off x="203198" y="631573"/>
+            <a:ext cx="11782715" cy="344693"/>
+          </a:xfrm>
+        </p:spPr>
+        <p:txBody>
+          <a:bodyPr anchor="b"/>
+          <a:lstStyle>
+            <a:lvl1pPr algn="l">
+              <a:defRPr sz="2000"/>
+            </a:lvl1pPr>
+          </a:lstStyle>
+          <a:p>
+            <a:endParaRPr lang="en-US" sz="6000" dirty="0">
+              <a:latin typeface="Trade Gothic Next" panose="020F0502020204030204" pitchFamily="34" charset="0"/>
+            </a:endParaRPr>
+          </a:p>
+        </p:txBody>
+      </p:sp>
+      <p:sp>
+        <p:nvSpPr>
+          <p:cNvPr id="13" name="Footer Placeholder 3">
+            <a:extLst>
+              <a:ext uri="{FF2B5EF4-FFF2-40B4-BE49-F238E27FC236}">
+                <a16:creationId xmlns:a16="http://schemas.microsoft.com/office/drawing/2014/main" id="{B978338D-8813-FE04-8F45-4ABF3845B0B6}"/>
+              </a:ext>
+            </a:extLst>
+          </p:cNvPr>
+          <p:cNvSpPr>
+            <a:spLocks noGrp="1"/>
+          </p:cNvSpPr>
+          <p:nvPr>
+            <p:ph type="ftr" sz="quarter" idx="12"/>
+          </p:nvPr>
+        </p:nvSpPr>
+        <p:spPr>
+          <a:xfrm>
+            <a:off x="203198" y="6577445"/>
+            <a:ext cx="8925216" cy="206878"/>
           </a:xfrm>
         </p:spPr>
         <p:txBody>
           <a:bodyPr/>
           <a:lstStyle/>
           <a:p>
+            <a:endParaRPr lang="en-US" dirty="0"/>
+          </a:p>
+        </p:txBody>
+      </p:sp>
+      <p:sp>
+        <p:nvSpPr>
+          <p:cNvPr id="14" name="Slide Number Placeholder 4">
+            <a:extLst>
+              <a:ext uri="{FF2B5EF4-FFF2-40B4-BE49-F238E27FC236}">
+                <a16:creationId xmlns:a16="http://schemas.microsoft.com/office/drawing/2014/main" id="{13131D74-AF68-8CD4-A80D-33FA2E6A9415}"/>
+              </a:ext>
+            </a:extLst>
+          </p:cNvPr>
+          <p:cNvSpPr>
+            <a:spLocks noGrp="1"/>
+          </p:cNvSpPr>
+          <p:nvPr>
+            <p:ph type="sldNum" sz="quarter" idx="13"/>
+          </p:nvPr>
+        </p:nvSpPr>
+        <p:spPr>
+          <a:xfrm>
+            <a:off x="9242713" y="6577445"/>
+            <a:ext cx="2743200" cy="206878"/>
+          </a:xfrm>
+        </p:spPr>
+        <p:txBody>
+          <a:bodyPr/>
+          <a:lstStyle/>
+          <a:p>
+            <a:fld id="{3328C88C-319F-4B98-9ED6-FBE1B0819F4B}" type="slidenum">
+              <a:rPr lang="en-US" smtClean="0"/>
+              <a:t>‹#›</a:t>
+            </a:fld>
+            <a:endParaRPr lang="en-US"/>
+          </a:p>
+        </p:txBody>
+      </p:sp>
+    </p:spTree>
+    <p:extLst>
+      <p:ext uri="{BB962C8B-B14F-4D97-AF65-F5344CB8AC3E}">
+        <p14:creationId xmlns:p14="http://schemas.microsoft.com/office/powerpoint/2010/main" val="2341134573"/>
+      </p:ext>
+    </p:extLst>
+  </p:cSld>
+  <p:clrMapOvr>
+    <a:masterClrMapping/>
+  </p:clrMapOvr>
+</p:sldLayout>
+</file>
+
+<file path=ppt/slideLayouts/slideLayout4.xml><?xml version="1.0" encoding="utf-8"?>
+<p:sldLayout xmlns:a="http://schemas.openxmlformats.org/drawingml/2006/main" xmlns:r="http://schemas.openxmlformats.org/officeDocument/2006/relationships" xmlns:p="http://schemas.openxmlformats.org/presentationml/2006/main" preserve="1" userDrawn="1">
+  <p:cSld name="Title_and_table">
+    <p:spTree>
+      <p:nvGrpSpPr>
+        <p:cNvPr id="1" name=""/>
+        <p:cNvGrpSpPr/>
+        <p:nvPr/>
+      </p:nvGrpSpPr>
+      <p:grpSpPr>
+        <a:xfrm>
+          <a:off x="0" y="0"/>
+          <a:ext cx="0" cy="0"/>
+          <a:chOff x="0" y="0"/>
+          <a:chExt cx="0" cy="0"/>
+        </a:xfrm>
+      </p:grpSpPr>
+      <p:sp>
+        <p:nvSpPr>
+          <p:cNvPr id="7" name="TextBox 6">
+            <a:extLst>
+              <a:ext uri="{FF2B5EF4-FFF2-40B4-BE49-F238E27FC236}">
+                <a16:creationId xmlns:a16="http://schemas.microsoft.com/office/drawing/2014/main" id="{BA0DCEC3-A2FF-6E31-D4B6-0277218CF982}"/>
+              </a:ext>
+            </a:extLst>
+          </p:cNvPr>
+          <p:cNvSpPr txBox="1"/>
+          <p:nvPr userDrawn="1"/>
+        </p:nvSpPr>
+        <p:spPr>
+          <a:xfrm>
+            <a:off x="98612" y="111423"/>
+            <a:ext cx="2850776" cy="461665"/>
+          </a:xfrm>
+          <a:prstGeom prst="rect">
+            <a:avLst/>
+          </a:prstGeom>
+          <a:noFill/>
+        </p:spPr>
+        <p:txBody>
+          <a:bodyPr wrap="square" rtlCol="0">
+            <a:spAutoFit/>
+          </a:bodyPr>
+          <a:lstStyle/>
+          <a:p>
+            <a:r>
+              <a:rPr lang="en-US" sz="2400" dirty="0">
+                <a:latin typeface="Trade Gothic Next" panose="020F0502020204030204" pitchFamily="34" charset="0"/>
+              </a:rPr>
+              <a:t>Morgan Stanley</a:t>
+            </a:r>
+          </a:p>
+        </p:txBody>
+      </p:sp>
+      <p:cxnSp>
+        <p:nvCxnSpPr>
+          <p:cNvPr id="9" name="Straight Connector 8">
+            <a:extLst>
+              <a:ext uri="{FF2B5EF4-FFF2-40B4-BE49-F238E27FC236}">
+                <a16:creationId xmlns:a16="http://schemas.microsoft.com/office/drawing/2014/main" id="{4B8A3F50-8510-19CB-7085-A95E3E9E4290}"/>
+              </a:ext>
+            </a:extLst>
+          </p:cNvPr>
+          <p:cNvCxnSpPr/>
+          <p:nvPr userDrawn="1"/>
+        </p:nvCxnSpPr>
+        <p:spPr>
+          <a:xfrm>
+            <a:off x="203200" y="573088"/>
+            <a:ext cx="11988800" cy="0"/>
+          </a:xfrm>
+          <a:prstGeom prst="line">
+            <a:avLst/>
+          </a:prstGeom>
+        </p:spPr>
+        <p:style>
+          <a:lnRef idx="2">
+            <a:schemeClr val="dk1"/>
+          </a:lnRef>
+          <a:fillRef idx="0">
+            <a:schemeClr val="dk1"/>
+          </a:fillRef>
+          <a:effectRef idx="1">
+            <a:schemeClr val="dk1"/>
+          </a:effectRef>
+          <a:fontRef idx="minor">
+            <a:schemeClr val="tx1"/>
+          </a:fontRef>
+        </p:style>
+      </p:cxnSp>
+      <p:cxnSp>
+        <p:nvCxnSpPr>
+          <p:cNvPr id="11" name="Straight Connector 10">
+            <a:extLst>
+              <a:ext uri="{FF2B5EF4-FFF2-40B4-BE49-F238E27FC236}">
+                <a16:creationId xmlns:a16="http://schemas.microsoft.com/office/drawing/2014/main" id="{D3E0CFD4-E6A1-4017-FBEF-8E0FDB73801D}"/>
+              </a:ext>
+            </a:extLst>
+          </p:cNvPr>
+          <p:cNvCxnSpPr/>
+          <p:nvPr userDrawn="1"/>
+        </p:nvCxnSpPr>
+        <p:spPr>
+          <a:xfrm>
+            <a:off x="203200" y="6534618"/>
+            <a:ext cx="11988800" cy="0"/>
+          </a:xfrm>
+          <a:prstGeom prst="line">
+            <a:avLst/>
+          </a:prstGeom>
+        </p:spPr>
+        <p:style>
+          <a:lnRef idx="2">
+            <a:schemeClr val="dk1"/>
+          </a:lnRef>
+          <a:fillRef idx="0">
+            <a:schemeClr val="dk1"/>
+          </a:fillRef>
+          <a:effectRef idx="1">
+            <a:schemeClr val="dk1"/>
+          </a:effectRef>
+          <a:fontRef idx="minor">
+            <a:schemeClr val="tx1"/>
+          </a:fontRef>
+        </p:style>
+      </p:cxnSp>
+      <p:sp>
+        <p:nvSpPr>
+          <p:cNvPr id="3" name="Table Placeholder 2">
+            <a:extLst>
+              <a:ext uri="{FF2B5EF4-FFF2-40B4-BE49-F238E27FC236}">
+                <a16:creationId xmlns:a16="http://schemas.microsoft.com/office/drawing/2014/main" id="{08FA77EC-EE7D-A602-6D21-6434A18B5E55}"/>
+              </a:ext>
+            </a:extLst>
+          </p:cNvPr>
+          <p:cNvSpPr>
+            <a:spLocks noGrp="1"/>
+          </p:cNvSpPr>
+          <p:nvPr>
+            <p:ph type="tbl" sz="quarter" idx="11"/>
+          </p:nvPr>
+        </p:nvSpPr>
+        <p:spPr>
+          <a:xfrm>
+            <a:off x="203200" y="1034750"/>
+            <a:ext cx="11829657" cy="5357958"/>
+          </a:xfrm>
+        </p:spPr>
+        <p:txBody>
+          <a:bodyPr/>
+          <a:lstStyle/>
+          <a:p>
+            <a:endParaRPr lang="en-US"/>
+          </a:p>
+        </p:txBody>
+      </p:sp>
+      <p:sp>
+        <p:nvSpPr>
+          <p:cNvPr id="6" name="Title 1">
+            <a:extLst>
+              <a:ext uri="{FF2B5EF4-FFF2-40B4-BE49-F238E27FC236}">
+                <a16:creationId xmlns:a16="http://schemas.microsoft.com/office/drawing/2014/main" id="{0A823388-BD02-F59F-7A61-D7F36015DB86}"/>
+              </a:ext>
+            </a:extLst>
+          </p:cNvPr>
+          <p:cNvSpPr>
+            <a:spLocks noGrp="1"/>
+          </p:cNvSpPr>
+          <p:nvPr>
+            <p:ph type="ctrTitle"/>
+          </p:nvPr>
+        </p:nvSpPr>
+        <p:spPr>
+          <a:xfrm>
+            <a:off x="203200" y="631573"/>
+            <a:ext cx="11782713" cy="344693"/>
+          </a:xfrm>
+        </p:spPr>
+        <p:txBody>
+          <a:bodyPr anchor="b"/>
+          <a:lstStyle>
+            <a:lvl1pPr algn="l">
+              <a:defRPr sz="2000"/>
+            </a:lvl1pPr>
+          </a:lstStyle>
+          <a:p>
+            <a:endParaRPr lang="en-US" sz="6000" dirty="0">
+              <a:latin typeface="Trade Gothic Next" panose="020F0502020204030204" pitchFamily="34" charset="0"/>
+            </a:endParaRPr>
+          </a:p>
+        </p:txBody>
+      </p:sp>
+      <p:sp>
+        <p:nvSpPr>
+          <p:cNvPr id="8" name="Footer Placeholder 3">
+            <a:extLst>
+              <a:ext uri="{FF2B5EF4-FFF2-40B4-BE49-F238E27FC236}">
+                <a16:creationId xmlns:a16="http://schemas.microsoft.com/office/drawing/2014/main" id="{F12D35B2-E6EA-9E8B-A8A9-95E6C482F53D}"/>
+              </a:ext>
+            </a:extLst>
+          </p:cNvPr>
+          <p:cNvSpPr>
+            <a:spLocks noGrp="1"/>
+          </p:cNvSpPr>
+          <p:nvPr>
+            <p:ph type="ftr" sz="quarter" idx="12"/>
+          </p:nvPr>
+        </p:nvSpPr>
+        <p:spPr>
+          <a:xfrm>
+            <a:off x="203198" y="6577445"/>
+            <a:ext cx="8925216" cy="206878"/>
+          </a:xfrm>
+        </p:spPr>
+        <p:txBody>
+          <a:bodyPr/>
+          <a:lstStyle/>
+          <a:p>
+            <a:endParaRPr lang="en-US" dirty="0"/>
+          </a:p>
+        </p:txBody>
+      </p:sp>
+      <p:sp>
+        <p:nvSpPr>
+          <p:cNvPr id="10" name="Slide Number Placeholder 4">
+            <a:extLst>
+              <a:ext uri="{FF2B5EF4-FFF2-40B4-BE49-F238E27FC236}">
+                <a16:creationId xmlns:a16="http://schemas.microsoft.com/office/drawing/2014/main" id="{534F0470-2711-5965-AB93-FB45DEC13663}"/>
+              </a:ext>
+            </a:extLst>
+          </p:cNvPr>
+          <p:cNvSpPr>
+            <a:spLocks noGrp="1"/>
+          </p:cNvSpPr>
+          <p:nvPr>
+            <p:ph type="sldNum" sz="quarter" idx="13"/>
+          </p:nvPr>
+        </p:nvSpPr>
+        <p:spPr>
+          <a:xfrm>
+            <a:off x="9242713" y="6577445"/>
+            <a:ext cx="2743200" cy="206878"/>
+          </a:xfrm>
+        </p:spPr>
+        <p:txBody>
+          <a:bodyPr/>
+          <a:lstStyle/>
+          <a:p>
+            <a:fld id="{3328C88C-319F-4B98-9ED6-FBE1B0819F4B}" type="slidenum">
+              <a:rPr lang="en-US" smtClean="0"/>
+              <a:t>‹#›</a:t>
+            </a:fld>
             <a:endParaRPr lang="en-US"/>
           </a:p>
         </p:txBody>
@@ -779,7 +1278,7 @@
           <a:lstStyle/>
           <a:p>
             <a:r>
-              <a:rPr lang="en-US"/>
+              <a:rPr lang="en-US" dirty="0"/>
               <a:t>Click to edit Master title style</a:t>
             </a:r>
           </a:p>
@@ -1000,7 +1499,8 @@
   <p:sldLayoutIdLst>
     <p:sldLayoutId id="2147483649" r:id="rId1"/>
     <p:sldLayoutId id="2147483650" r:id="rId2"/>
-    <p:sldLayoutId id="2147483651" r:id="rId3"/>
+    <p:sldLayoutId id="2147483652" r:id="rId3"/>
+    <p:sldLayoutId id="2147483651" r:id="rId4"/>
   </p:sldLayoutIdLst>
   <p:txStyles>
     <p:titleStyle>
@@ -1326,110 +1826,16 @@
         <a:srgbClr val="96607D"/>
       </a:folHlink>
     </a:clrScheme>
-    <a:fontScheme name="Office">
+    <a:fontScheme name="Custom 2">
       <a:majorFont>
-        <a:latin typeface="Aptos Display" panose="02110004020202020204"/>
+        <a:latin typeface="Aptos Black"/>
         <a:ea typeface=""/>
         <a:cs typeface=""/>
-        <a:font script="Jpan" typeface="游ゴシック Light"/>
-        <a:font script="Hang" typeface="맑은 고딕"/>
-        <a:font script="Hans" typeface="等线 Light"/>
-        <a:font script="Hant" typeface="新細明體"/>
-        <a:font script="Arab" typeface="Times New Roman"/>
-        <a:font script="Hebr" typeface="Times New Roman"/>
-        <a:font script="Thai" typeface="Angsana New"/>
-        <a:font script="Ethi" typeface="Nyala"/>
-        <a:font script="Beng" typeface="Vrinda"/>
-        <a:font script="Gujr" typeface="Shruti"/>
-        <a:font script="Khmr" typeface="MoolBoran"/>
-        <a:font script="Knda" typeface="Tunga"/>
-        <a:font script="Guru" typeface="Raavi"/>
-        <a:font script="Cans" typeface="Euphemia"/>
-        <a:font script="Cher" typeface="Plantagenet Cherokee"/>
-        <a:font script="Yiii" typeface="Microsoft Yi Baiti"/>
-        <a:font script="Tibt" typeface="Microsoft Himalaya"/>
-        <a:font script="Thaa" typeface="MV Boli"/>
-        <a:font script="Deva" typeface="Mangal"/>
-        <a:font script="Telu" typeface="Gautami"/>
-        <a:font script="Taml" typeface="Latha"/>
-        <a:font script="Syrc" typeface="Estrangelo Edessa"/>
-        <a:font script="Orya" typeface="Kalinga"/>
-        <a:font script="Mlym" typeface="Kartika"/>
-        <a:font script="Laoo" typeface="DokChampa"/>
-        <a:font script="Sinh" typeface="Iskoola Pota"/>
-        <a:font script="Mong" typeface="Mongolian Baiti"/>
-        <a:font script="Viet" typeface="Times New Roman"/>
-        <a:font script="Uigh" typeface="Microsoft Uighur"/>
-        <a:font script="Geor" typeface="Sylfaen"/>
-        <a:font script="Armn" typeface="Arial"/>
-        <a:font script="Bugi" typeface="Leelawadee UI"/>
-        <a:font script="Bopo" typeface="Microsoft JhengHei"/>
-        <a:font script="Java" typeface="Javanese Text"/>
-        <a:font script="Lisu" typeface="Segoe UI"/>
-        <a:font script="Mymr" typeface="Myanmar Text"/>
-        <a:font script="Nkoo" typeface="Ebrima"/>
-        <a:font script="Olck" typeface="Nirmala UI"/>
-        <a:font script="Osma" typeface="Ebrima"/>
-        <a:font script="Phag" typeface="Phagspa"/>
-        <a:font script="Syrn" typeface="Estrangelo Edessa"/>
-        <a:font script="Syrj" typeface="Estrangelo Edessa"/>
-        <a:font script="Syre" typeface="Estrangelo Edessa"/>
-        <a:font script="Sora" typeface="Nirmala UI"/>
-        <a:font script="Tale" typeface="Microsoft Tai Le"/>
-        <a:font script="Talu" typeface="Microsoft New Tai Lue"/>
-        <a:font script="Tfng" typeface="Ebrima"/>
       </a:majorFont>
       <a:minorFont>
-        <a:latin typeface="Aptos" panose="02110004020202020204"/>
+        <a:latin typeface="Aptos"/>
         <a:ea typeface=""/>
         <a:cs typeface=""/>
-        <a:font script="Jpan" typeface="游ゴシック"/>
-        <a:font script="Hang" typeface="맑은 고딕"/>
-        <a:font script="Hans" typeface="等线"/>
-        <a:font script="Hant" typeface="新細明體"/>
-        <a:font script="Arab" typeface="Arial"/>
-        <a:font script="Hebr" typeface="Arial"/>
-        <a:font script="Thai" typeface="Cordia New"/>
-        <a:font script="Ethi" typeface="Nyala"/>
-        <a:font script="Beng" typeface="Vrinda"/>
-        <a:font script="Gujr" typeface="Shruti"/>
-        <a:font script="Khmr" typeface="DaunPenh"/>
-        <a:font script="Knda" typeface="Tunga"/>
-        <a:font script="Guru" typeface="Raavi"/>
-        <a:font script="Cans" typeface="Euphemia"/>
-        <a:font script="Cher" typeface="Plantagenet Cherokee"/>
-        <a:font script="Yiii" typeface="Microsoft Yi Baiti"/>
-        <a:font script="Tibt" typeface="Microsoft Himalaya"/>
-        <a:font script="Thaa" typeface="MV Boli"/>
-        <a:font script="Deva" typeface="Mangal"/>
-        <a:font script="Telu" typeface="Gautami"/>
-        <a:font script="Taml" typeface="Latha"/>
-        <a:font script="Syrc" typeface="Estrangelo Edessa"/>
-        <a:font script="Orya" typeface="Kalinga"/>
-        <a:font script="Mlym" typeface="Kartika"/>
-        <a:font script="Laoo" typeface="DokChampa"/>
-        <a:font script="Sinh" typeface="Iskoola Pota"/>
-        <a:font script="Mong" typeface="Mongolian Baiti"/>
-        <a:font script="Viet" typeface="Arial"/>
-        <a:font script="Uigh" typeface="Microsoft Uighur"/>
-        <a:font script="Geor" typeface="Sylfaen"/>
-        <a:font script="Armn" typeface="Arial"/>
-        <a:font script="Bugi" typeface="Leelawadee UI"/>
-        <a:font script="Bopo" typeface="Microsoft JhengHei"/>
-        <a:font script="Java" typeface="Javanese Text"/>
-        <a:font script="Lisu" typeface="Segoe UI"/>
-        <a:font script="Mymr" typeface="Myanmar Text"/>
-        <a:font script="Nkoo" typeface="Ebrima"/>
-        <a:font script="Olck" typeface="Nirmala UI"/>
-        <a:font script="Osma" typeface="Ebrima"/>
-        <a:font script="Phag" typeface="Phagspa"/>
-        <a:font script="Syrn" typeface="Estrangelo Edessa"/>
-        <a:font script="Syrj" typeface="Estrangelo Edessa"/>
-        <a:font script="Syre" typeface="Estrangelo Edessa"/>
-        <a:font script="Sora" typeface="Nirmala UI"/>
-        <a:font script="Tale" typeface="Microsoft Tai Le"/>
-        <a:font script="Talu" typeface="Microsoft New Tai Lue"/>
-        <a:font script="Tfng" typeface="Ebrima"/>
       </a:minorFont>
     </a:fontScheme>
     <a:fmtScheme name="Office">

--- a/backend/templates/template3.pptx
+++ b/backend/templates/template3.pptx
@@ -249,7 +249,7 @@
         <p:spPr>
           <a:xfrm>
             <a:off x="98612" y="111423"/>
-            <a:ext cx="2850776" cy="461665"/>
+            <a:ext cx="3236870" cy="461665"/>
           </a:xfrm>
           <a:prstGeom prst="rect">
             <a:avLst/>
@@ -266,7 +266,7 @@
               <a:rPr lang="en-US" sz="2400" dirty="0">
                 <a:latin typeface="Trade Gothic Next" panose="020F0502020204030204" pitchFamily="34" charset="0"/>
               </a:rPr>
-              <a:t>Morgan Stanley</a:t>
+              <a:t>Investment Advisor Co</a:t>
             </a:r>
           </a:p>
         </p:txBody>
@@ -380,7 +380,7 @@
         <p:spPr>
           <a:xfrm>
             <a:off x="98612" y="111423"/>
-            <a:ext cx="2850776" cy="461665"/>
+            <a:ext cx="3694070" cy="461665"/>
           </a:xfrm>
           <a:prstGeom prst="rect">
             <a:avLst/>
@@ -397,7 +397,7 @@
               <a:rPr lang="en-US" sz="2400" dirty="0">
                 <a:latin typeface="Trade Gothic Next" panose="020F0502020204030204" pitchFamily="34" charset="0"/>
               </a:rPr>
-              <a:t>Morgan Stanley</a:t>
+              <a:t>Investment Advisor Co</a:t>
             </a:r>
           </a:p>
         </p:txBody>
@@ -662,7 +662,7 @@
         <p:spPr>
           <a:xfrm>
             <a:off x="98612" y="111423"/>
-            <a:ext cx="2850776" cy="461665"/>
+            <a:ext cx="4281156" cy="461665"/>
           </a:xfrm>
           <a:prstGeom prst="rect">
             <a:avLst/>
@@ -679,7 +679,7 @@
               <a:rPr lang="en-US" sz="2400" dirty="0">
                 <a:latin typeface="Trade Gothic Next" panose="020F0502020204030204" pitchFamily="34" charset="0"/>
               </a:rPr>
-              <a:t>Morgan Stanley</a:t>
+              <a:t>Investment Advisor Co</a:t>
             </a:r>
           </a:p>
         </p:txBody>
@@ -986,8 +986,8 @@
         </p:nvSpPr>
         <p:spPr>
           <a:xfrm>
-            <a:off x="98612" y="111423"/>
-            <a:ext cx="2850776" cy="461665"/>
+            <a:off x="98611" y="111423"/>
+            <a:ext cx="3533011" cy="461665"/>
           </a:xfrm>
           <a:prstGeom prst="rect">
             <a:avLst/>
@@ -1004,7 +1004,7 @@
               <a:rPr lang="en-US" sz="2400" dirty="0">
                 <a:latin typeface="Trade Gothic Next" panose="020F0502020204030204" pitchFamily="34" charset="0"/>
               </a:rPr>
-              <a:t>Morgan Stanley</a:t>
+              <a:t>Investment Advisor Co</a:t>
             </a:r>
           </a:p>
         </p:txBody>
